--- a/Accompagnement contrôle URSSAF - Ayming.pptx
+++ b/Accompagnement contrôle URSSAF - Ayming.pptx
@@ -3266,8 +3266,8 @@
         </p:nvSpPr>
         <p:spPr>
           <a:xfrm>
-            <a:off x="857228" y="4937547"/>
-            <a:ext cx="1348200" cy="390515"/>
+            <a:off x="258529" y="5135007"/>
+            <a:ext cx="1502280" cy="435145"/>
           </a:xfrm>
           <a:prstGeom prst="rect">
             <a:avLst/>
